--- a/docs/reports/台灣產業趨勢監測週報_2026-10-19_2026-10-26.pptx
+++ b/docs/reports/台灣產業趨勢監測週報_2026-10-19_2026-10-26.pptx
@@ -183,37 +183,37 @@
                 <c:formatCode>General</c:formatCode>
                 <c:ptCount val="11"/>
                 <c:pt idx="0">
-                  <c:v>62</c:v>
+                  <c:v>63</c:v>
                 </c:pt>
                 <c:pt idx="1">
-                  <c:v>122</c:v>
+                  <c:v>131</c:v>
                 </c:pt>
                 <c:pt idx="2">
-                  <c:v>164</c:v>
+                  <c:v>170</c:v>
                 </c:pt>
                 <c:pt idx="3">
-                  <c:v>204</c:v>
+                  <c:v>212</c:v>
                 </c:pt>
                 <c:pt idx="4">
-                  <c:v>257</c:v>
+                  <c:v>262</c:v>
                 </c:pt>
                 <c:pt idx="5">
-                  <c:v>270</c:v>
+                  <c:v>277</c:v>
                 </c:pt>
                 <c:pt idx="6">
-                  <c:v>293</c:v>
+                  <c:v>306</c:v>
                 </c:pt>
                 <c:pt idx="7">
-                  <c:v>368</c:v>
+                  <c:v>379</c:v>
                 </c:pt>
                 <c:pt idx="8">
-                  <c:v>659</c:v>
+                  <c:v>692</c:v>
                 </c:pt>
                 <c:pt idx="9">
-                  <c:v>774</c:v>
+                  <c:v>796</c:v>
                 </c:pt>
                 <c:pt idx="10">
-                  <c:v>903</c:v>
+                  <c:v>923</c:v>
                 </c:pt>
               </c:numCache>
             </c:numRef>
@@ -332,7 +332,7 @@
                   <c:v>14</c:v>
                 </c:pt>
                 <c:pt idx="1">
-                  <c:v>12</c:v>
+                  <c:v>13</c:v>
                 </c:pt>
                 <c:pt idx="2">
                   <c:v>10</c:v>
@@ -538,16 +538,16 @@
                 <c:formatCode>General</c:formatCode>
                 <c:ptCount val="6"/>
                 <c:pt idx="0">
-                  <c:v>202</c:v>
+                  <c:v>209</c:v>
                 </c:pt>
                 <c:pt idx="1">
-                  <c:v>149</c:v>
+                  <c:v>154</c:v>
                 </c:pt>
                 <c:pt idx="2">
-                  <c:v>39</c:v>
+                  <c:v>40</c:v>
                 </c:pt>
                 <c:pt idx="3">
-                  <c:v>33</c:v>
+                  <c:v>34</c:v>
                 </c:pt>
                 <c:pt idx="4">
                   <c:v>24</c:v>
@@ -3705,7 +3705,7 @@
           </a:p>
           <a:p>
             <a:r>
-              <a:t>產出:2026-10-26 13:41(台北時間)</a:t>
+              <a:t>產出:2026-10-26 18:08(台北時間)</a:t>
             </a:r>
           </a:p>
           <a:p>
@@ -3773,7 +3773,7 @@
               <a:defRPr sz="1600"/>
             </a:pPr>
             <a:r>
-              <a:t>本期共蒐集 8815 篇公開報導,可歸類 4076 篇</a:t>
+              <a:t>本期共蒐集 9136 篇公開報導,可歸類 4211 篇</a:t>
             </a:r>
           </a:p>
           <a:p>
@@ -3781,7 +3781,7 @@
               <a:defRPr sz="1600"/>
             </a:pPr>
             <a:r>
-              <a:t>高科技製造業:903 篇(佔可歸類 22.2%)</a:t>
+              <a:t>高科技製造業:923 篇(佔可歸類 21.9%)</a:t>
             </a:r>
           </a:p>
           <a:p>
@@ -3789,7 +3789,7 @@
               <a:defRPr sz="1600"/>
             </a:pPr>
             <a:r>
-              <a:t>金融業:774 篇(佔可歸類 19.0%)</a:t>
+              <a:t>金融業:796 篇(佔可歸類 18.9%)</a:t>
             </a:r>
           </a:p>
           <a:p>
@@ -3797,7 +3797,7 @@
               <a:defRPr sz="1600"/>
             </a:pPr>
             <a:r>
-              <a:t>政府教育單位:659 篇(佔可歸類 16.2%)</a:t>
+              <a:t>政府教育單位:692 篇(佔可歸類 16.4%)</a:t>
             </a:r>
           </a:p>
           <a:p>
@@ -3805,7 +3805,7 @@
               <a:defRPr sz="1600"/>
             </a:pPr>
             <a:r>
-              <a:t>最熱主題:AI 與自動化(939 篇)、利率與資金環境(260 篇)、地緣政治與供應鏈(197 篇)</a:t>
+              <a:t>最熱主題:AI 與自動化(972 篇)、利率與資金環境(270 篇)、地緣政治與供應鏈(206 篇)</a:t>
             </a:r>
           </a:p>
           <a:p>
@@ -3909,7 +3909,7 @@
           <a:lstStyle/>
           <a:p>
             <a:r>
-              <a:t>競品聲量對比(SOV)— 電腦品牌(合計 47 篇)</a:t>
+              <a:t>競品聲量對比(SOV)— 電腦品牌(合計 48 篇)</a:t>
             </a:r>
           </a:p>
         </p:txBody>
@@ -3966,7 +3966,7 @@
           <a:lstStyle/>
           <a:p>
             <a:r>
-              <a:t>競品聲量對比(SOV)— 半導體(合計 467 篇)</a:t>
+              <a:t>競品聲量對比(SOV)— 半導體(合計 481 篇)</a:t>
             </a:r>
           </a:p>
         </p:txBody>

--- a/docs/reports/台灣產業趨勢監測週報_2026-10-19_2026-10-26.pptx
+++ b/docs/reports/台灣產業趨勢監測週報_2026-10-19_2026-10-26.pptx
@@ -186,34 +186,34 @@
                   <c:v>63</c:v>
                 </c:pt>
                 <c:pt idx="1">
-                  <c:v>131</c:v>
+                  <c:v>141</c:v>
                 </c:pt>
                 <c:pt idx="2">
-                  <c:v>170</c:v>
+                  <c:v>172</c:v>
                 </c:pt>
                 <c:pt idx="3">
                   <c:v>212</c:v>
                 </c:pt>
                 <c:pt idx="4">
-                  <c:v>262</c:v>
+                  <c:v>263</c:v>
                 </c:pt>
                 <c:pt idx="5">
-                  <c:v>277</c:v>
+                  <c:v>279</c:v>
                 </c:pt>
                 <c:pt idx="6">
-                  <c:v>306</c:v>
+                  <c:v>315</c:v>
                 </c:pt>
                 <c:pt idx="7">
-                  <c:v>379</c:v>
+                  <c:v>384</c:v>
                 </c:pt>
                 <c:pt idx="8">
-                  <c:v>692</c:v>
+                  <c:v>709</c:v>
                 </c:pt>
                 <c:pt idx="9">
-                  <c:v>796</c:v>
+                  <c:v>799</c:v>
                 </c:pt>
                 <c:pt idx="10">
-                  <c:v>923</c:v>
+                  <c:v>931</c:v>
                 </c:pt>
               </c:numCache>
             </c:numRef>
@@ -538,13 +538,13 @@
                 <c:formatCode>General</c:formatCode>
                 <c:ptCount val="6"/>
                 <c:pt idx="0">
-                  <c:v>209</c:v>
+                  <c:v>210</c:v>
                 </c:pt>
                 <c:pt idx="1">
-                  <c:v>154</c:v>
+                  <c:v>160</c:v>
                 </c:pt>
                 <c:pt idx="2">
-                  <c:v>40</c:v>
+                  <c:v>41</c:v>
                 </c:pt>
                 <c:pt idx="3">
                   <c:v>34</c:v>
@@ -553,7 +553,7 @@
                   <c:v>24</c:v>
                 </c:pt>
                 <c:pt idx="5">
-                  <c:v>20</c:v>
+                  <c:v>22</c:v>
                 </c:pt>
               </c:numCache>
             </c:numRef>
@@ -3705,7 +3705,7 @@
           </a:p>
           <a:p>
             <a:r>
-              <a:t>產出:2026-10-26 18:08(台北時間)</a:t>
+              <a:t>產出:2026-10-26 19:37(台北時間)</a:t>
             </a:r>
           </a:p>
           <a:p>
@@ -3773,7 +3773,7 @@
               <a:defRPr sz="1600"/>
             </a:pPr>
             <a:r>
-              <a:t>本期共蒐集 9136 篇公開報導,可歸類 4211 篇</a:t>
+              <a:t>本期共蒐集 9297 篇公開報導,可歸類 4268 篇</a:t>
             </a:r>
           </a:p>
           <a:p>
@@ -3781,7 +3781,7 @@
               <a:defRPr sz="1600"/>
             </a:pPr>
             <a:r>
-              <a:t>高科技製造業:923 篇(佔可歸類 21.9%)</a:t>
+              <a:t>高科技製造業:931 篇(佔可歸類 21.8%)</a:t>
             </a:r>
           </a:p>
           <a:p>
@@ -3789,7 +3789,7 @@
               <a:defRPr sz="1600"/>
             </a:pPr>
             <a:r>
-              <a:t>金融業:796 篇(佔可歸類 18.9%)</a:t>
+              <a:t>金融業:799 篇(佔可歸類 18.7%)</a:t>
             </a:r>
           </a:p>
           <a:p>
@@ -3797,7 +3797,7 @@
               <a:defRPr sz="1600"/>
             </a:pPr>
             <a:r>
-              <a:t>政府教育單位:692 篇(佔可歸類 16.4%)</a:t>
+              <a:t>政府教育單位:709 篇(佔可歸類 16.6%)</a:t>
             </a:r>
           </a:p>
           <a:p>
@@ -3805,7 +3805,7 @@
               <a:defRPr sz="1600"/>
             </a:pPr>
             <a:r>
-              <a:t>最熱主題:AI 與自動化(972 篇)、利率與資金環境(270 篇)、地緣政治與供應鏈(206 篇)</a:t>
+              <a:t>最熱主題:AI 與自動化(981 篇)、利率與資金環境(273 篇)、地緣政治與供應鏈(207 篇)</a:t>
             </a:r>
           </a:p>
           <a:p>
@@ -3966,7 +3966,7 @@
           <a:lstStyle/>
           <a:p>
             <a:r>
-              <a:t>競品聲量對比(SOV)— 半導體(合計 481 篇)</a:t>
+              <a:t>競品聲量對比(SOV)— 半導體(合計 491 篇)</a:t>
             </a:r>
           </a:p>
         </p:txBody>
